--- a/dist/초5/국어/독서와추론/초5_국어_독서와추론_02_글의구조_학생용.pptx
+++ b/dist/초5/국어/독서와추론/초5_국어_독서와추론_02_글의구조_학생용.pptx
@@ -120,13 +120,13 @@
   <p:extLst>
     <p:ext uri="{521415D9-36F7-43E2-AB2F-B90AF26B5E84}">
       <p14:sectionLst xmlns:p14="http://schemas.microsoft.com/office/powerpoint/2010/main">
-        <p14:section name="도입" id="{103969d3-d52e-d4d5-3213-75df3fea1f39}">
+        <p14:section name="도입" id="{a308ea82-c285-97ed-a657-64690edf4562}">
           <p14:sldIdLst>
             <p14:sldId id="256"/>
             <p14:sldId id="257"/>
           </p14:sldIdLst>
         </p14:section>
-        <p14:section name="개념" id="{627798d5-c033-bc75-8e7a-f132a4a2ee74}">
+        <p14:section name="개념" id="{b469b4ed-1223-d0fb-6cf0-8bad29f9d58e}">
           <p14:sldIdLst>
             <p14:sldId id="258"/>
             <p14:sldId id="259"/>
@@ -136,24 +136,24 @@
             <p14:sldId id="263"/>
           </p14:sldIdLst>
         </p14:section>
-        <p14:section name="연습" id="{c37e5f54-f8d5-bfbc-da29-2c0a8cca64cc}">
+        <p14:section name="연습" id="{57155afe-eb60-0b3a-bdff-94682e0b9d6e}">
           <p14:sldIdLst>
             <p14:sldId id="264"/>
             <p14:sldId id="265"/>
           </p14:sldIdLst>
         </p14:section>
-        <p14:section name="확인" id="{981e512d-264b-f0bb-5b4b-240421ecfaa7}">
+        <p14:section name="확인" id="{484a7dc2-4246-5d82-8390-20651ddb716e}">
           <p14:sldIdLst>
             <p14:sldId id="266"/>
             <p14:sldId id="267"/>
           </p14:sldIdLst>
         </p14:section>
-        <p14:section name="정리" id="{52506008-f009-be18-6c2a-1756d9612dee}">
+        <p14:section name="정리" id="{ab629a6b-ac71-447e-be2a-b4d35785596b}">
           <p14:sldIdLst>
             <p14:sldId id="268"/>
           </p14:sldIdLst>
         </p14:section>
-        <p14:section name="보충" id="{580b36c1-8bc8-37a1-1be9-a5cbb615d0f4}">
+        <p14:section name="보충" id="{b7f50ec4-0e0c-3a90-55f5-7559690d05c4}">
           <p14:sldIdLst>
             <p14:sldId id="269"/>
           </p14:sldIdLst>
